--- a/examples/tk2/presentation_tk2.pptx
+++ b/examples/tk2/presentation_tk2.pptx
@@ -6,6 +6,14 @@
   </p:sldMasterIdLst>
   <p:sldIdLst>
     <p:sldId id="256" r:id="rId7"/>
+    <p:sldId id="257" r:id="rId9"/>
+    <p:sldId id="258" r:id="rId10"/>
+    <p:sldId id="259" r:id="rId11"/>
+    <p:sldId id="260" r:id="rId12"/>
+    <p:sldId id="261" r:id="rId13"/>
+    <p:sldId id="262" r:id="rId14"/>
+    <p:sldId id="263" r:id="rId15"/>
+    <p:sldId id="264" r:id="rId16"/>
   </p:sldIdLst>
   <p:sldSz cx="9144000" cy="6858000" type="screen4x3"/>
   <p:notesSz cx="6858000" cy="9144000"/>
@@ -502,7 +510,567 @@
           <a:lstStyle/>
           <a:p>
             <a:r>
-              <a:t>Сгенерируйте слайды навыком S13 (GigaChat) перед выгрузкой.</a:t>
+              <a:t>В отличие от классификаторов (диагностика, распознавание), генеративные модели создают новое.</a:t>
+            </a:r>
+          </a:p>
+        </p:txBody>
+      </p:sp>
+      <p:sp>
+        <p:nvSpPr>
+          <p:cNvPr id="4" name="Slide Number Placeholder 3"/>
+          <p:cNvSpPr>
+            <a:spLocks noGrp="1"/>
+          </p:cNvSpPr>
+          <p:nvPr>
+            <p:ph type="sldNum" idx="5" sz="quarter"/>
+          </p:nvPr>
+        </p:nvSpPr>
+        <p:spPr/>
+      </p:sp>
+    </p:spTree>
+  </p:cSld>
+  <p:clrMapOvr>
+    <a:masterClrMapping/>
+  </p:clrMapOvr>
+</p:notes>
+</file>
+
+<file path=ppt/notesSlides/notesSlide2.xml><?xml version="1.0" encoding="utf-8"?>
+<p:notes xmlns:a="http://schemas.openxmlformats.org/drawingml/2006/main" xmlns:p="http://schemas.openxmlformats.org/presentationml/2006/main" xmlns:r="http://schemas.openxmlformats.org/officeDocument/2006/relationships">
+  <p:cSld>
+    <p:spTree>
+      <p:nvGrpSpPr>
+        <p:cNvPr id="1" name=""/>
+        <p:cNvGrpSpPr/>
+        <p:nvPr/>
+      </p:nvGrpSpPr>
+      <p:grpSpPr>
+        <a:xfrm>
+          <a:off x="0" y="0"/>
+          <a:ext cx="0" cy="0"/>
+          <a:chOff x="0" y="0"/>
+          <a:chExt cx="0" cy="0"/>
+        </a:xfrm>
+      </p:grpSpPr>
+      <p:sp>
+        <p:nvSpPr>
+          <p:cNvPr id="2" name="Slide Image Placeholder 1"/>
+          <p:cNvSpPr>
+            <a:spLocks noGrp="1"/>
+          </p:cNvSpPr>
+          <p:nvPr>
+            <p:ph type="sldImg" idx="2"/>
+          </p:nvPr>
+        </p:nvSpPr>
+        <p:spPr/>
+      </p:sp>
+      <p:sp>
+        <p:nvSpPr>
+          <p:cNvPr id="3" name="Notes Placeholder 2"/>
+          <p:cNvSpPr>
+            <a:spLocks noGrp="1"/>
+          </p:cNvSpPr>
+          <p:nvPr>
+            <p:ph type="body" idx="3" sz="quarter"/>
+          </p:nvPr>
+        </p:nvSpPr>
+        <p:spPr/>
+        <p:txBody>
+          <a:bodyPr/>
+          <a:lstStyle/>
+          <a:p>
+            <a:r>
+              <a:t>Показать рост интереса и возможностей за последние 10 лет.</a:t>
+            </a:r>
+          </a:p>
+        </p:txBody>
+      </p:sp>
+      <p:sp>
+        <p:nvSpPr>
+          <p:cNvPr id="4" name="Slide Number Placeholder 3"/>
+          <p:cNvSpPr>
+            <a:spLocks noGrp="1"/>
+          </p:cNvSpPr>
+          <p:nvPr>
+            <p:ph type="sldNum" idx="5" sz="quarter"/>
+          </p:nvPr>
+        </p:nvSpPr>
+        <p:spPr/>
+      </p:sp>
+    </p:spTree>
+  </p:cSld>
+  <p:clrMapOvr>
+    <a:masterClrMapping/>
+  </p:clrMapOvr>
+</p:notes>
+</file>
+
+<file path=ppt/notesSlides/notesSlide3.xml><?xml version="1.0" encoding="utf-8"?>
+<p:notes xmlns:a="http://schemas.openxmlformats.org/drawingml/2006/main" xmlns:p="http://schemas.openxmlformats.org/presentationml/2006/main" xmlns:r="http://schemas.openxmlformats.org/officeDocument/2006/relationships">
+  <p:cSld>
+    <p:spTree>
+      <p:nvGrpSpPr>
+        <p:cNvPr id="1" name=""/>
+        <p:cNvGrpSpPr/>
+        <p:nvPr/>
+      </p:nvGrpSpPr>
+      <p:grpSpPr>
+        <a:xfrm>
+          <a:off x="0" y="0"/>
+          <a:ext cx="0" cy="0"/>
+          <a:chOff x="0" y="0"/>
+          <a:chExt cx="0" cy="0"/>
+        </a:xfrm>
+      </p:grpSpPr>
+      <p:sp>
+        <p:nvSpPr>
+          <p:cNvPr id="2" name="Slide Image Placeholder 1"/>
+          <p:cNvSpPr>
+            <a:spLocks noGrp="1"/>
+          </p:cNvSpPr>
+          <p:nvPr>
+            <p:ph type="sldImg" idx="2"/>
+          </p:nvPr>
+        </p:nvSpPr>
+        <p:spPr/>
+      </p:sp>
+      <p:sp>
+        <p:nvSpPr>
+          <p:cNvPr id="3" name="Notes Placeholder 2"/>
+          <p:cNvSpPr>
+            <a:spLocks noGrp="1"/>
+          </p:cNvSpPr>
+          <p:nvPr>
+            <p:ph type="body" idx="3" sz="quarter"/>
+          </p:nvPr>
+        </p:nvSpPr>
+        <p:spPr/>
+        <p:txBody>
+          <a:bodyPr/>
+          <a:lstStyle/>
+          <a:p>
+            <a:r>
+              <a:t>Обратить внимание: модель не «понимает», а «воспроизводит» статистические закономерности.</a:t>
+            </a:r>
+          </a:p>
+        </p:txBody>
+      </p:sp>
+      <p:sp>
+        <p:nvSpPr>
+          <p:cNvPr id="4" name="Slide Number Placeholder 3"/>
+          <p:cNvSpPr>
+            <a:spLocks noGrp="1"/>
+          </p:cNvSpPr>
+          <p:nvPr>
+            <p:ph type="sldNum" idx="5" sz="quarter"/>
+          </p:nvPr>
+        </p:nvSpPr>
+        <p:spPr/>
+      </p:sp>
+    </p:spTree>
+  </p:cSld>
+  <p:clrMapOvr>
+    <a:masterClrMapping/>
+  </p:clrMapOvr>
+</p:notes>
+</file>
+
+<file path=ppt/notesSlides/notesSlide4.xml><?xml version="1.0" encoding="utf-8"?>
+<p:notes xmlns:a="http://schemas.openxmlformats.org/drawingml/2006/main" xmlns:p="http://schemas.openxmlformats.org/presentationml/2006/main" xmlns:r="http://schemas.openxmlformats.org/officeDocument/2006/relationships">
+  <p:cSld>
+    <p:spTree>
+      <p:nvGrpSpPr>
+        <p:cNvPr id="1" name=""/>
+        <p:cNvGrpSpPr/>
+        <p:nvPr/>
+      </p:nvGrpSpPr>
+      <p:grpSpPr>
+        <a:xfrm>
+          <a:off x="0" y="0"/>
+          <a:ext cx="0" cy="0"/>
+          <a:chOff x="0" y="0"/>
+          <a:chExt cx="0" cy="0"/>
+        </a:xfrm>
+      </p:grpSpPr>
+      <p:sp>
+        <p:nvSpPr>
+          <p:cNvPr id="2" name="Slide Image Placeholder 1"/>
+          <p:cNvSpPr>
+            <a:spLocks noGrp="1"/>
+          </p:cNvSpPr>
+          <p:nvPr>
+            <p:ph type="sldImg" idx="2"/>
+          </p:nvPr>
+        </p:nvSpPr>
+        <p:spPr/>
+      </p:sp>
+      <p:sp>
+        <p:nvSpPr>
+          <p:cNvPr id="3" name="Notes Placeholder 2"/>
+          <p:cNvSpPr>
+            <a:spLocks noGrp="1"/>
+          </p:cNvSpPr>
+          <p:nvPr>
+            <p:ph type="body" idx="3" sz="quarter"/>
+          </p:nvPr>
+        </p:nvSpPr>
+        <p:spPr/>
+        <p:txBody>
+          <a:bodyPr/>
+          <a:lstStyle/>
+          <a:p>
+            <a:r>
+              <a:t>Примеры: подготовка материалов, визуализация сложных понятий.</a:t>
+            </a:r>
+          </a:p>
+        </p:txBody>
+      </p:sp>
+      <p:sp>
+        <p:nvSpPr>
+          <p:cNvPr id="4" name="Slide Number Placeholder 3"/>
+          <p:cNvSpPr>
+            <a:spLocks noGrp="1"/>
+          </p:cNvSpPr>
+          <p:nvPr>
+            <p:ph type="sldNum" idx="5" sz="quarter"/>
+          </p:nvPr>
+        </p:nvSpPr>
+        <p:spPr/>
+      </p:sp>
+    </p:spTree>
+  </p:cSld>
+  <p:clrMapOvr>
+    <a:masterClrMapping/>
+  </p:clrMapOvr>
+</p:notes>
+</file>
+
+<file path=ppt/notesSlides/notesSlide5.xml><?xml version="1.0" encoding="utf-8"?>
+<p:notes xmlns:a="http://schemas.openxmlformats.org/drawingml/2006/main" xmlns:p="http://schemas.openxmlformats.org/presentationml/2006/main" xmlns:r="http://schemas.openxmlformats.org/officeDocument/2006/relationships">
+  <p:cSld>
+    <p:spTree>
+      <p:nvGrpSpPr>
+        <p:cNvPr id="1" name=""/>
+        <p:cNvGrpSpPr/>
+        <p:nvPr/>
+      </p:nvGrpSpPr>
+      <p:grpSpPr>
+        <a:xfrm>
+          <a:off x="0" y="0"/>
+          <a:ext cx="0" cy="0"/>
+          <a:chOff x="0" y="0"/>
+          <a:chExt cx="0" cy="0"/>
+        </a:xfrm>
+      </p:grpSpPr>
+      <p:sp>
+        <p:nvSpPr>
+          <p:cNvPr id="2" name="Slide Image Placeholder 1"/>
+          <p:cNvSpPr>
+            <a:spLocks noGrp="1"/>
+          </p:cNvSpPr>
+          <p:nvPr>
+            <p:ph type="sldImg" idx="2"/>
+          </p:nvPr>
+        </p:nvSpPr>
+        <p:spPr/>
+      </p:sp>
+      <p:sp>
+        <p:nvSpPr>
+          <p:cNvPr id="3" name="Notes Placeholder 2"/>
+          <p:cNvSpPr>
+            <a:spLocks noGrp="1"/>
+          </p:cNvSpPr>
+          <p:nvPr>
+            <p:ph type="body" idx="3" sz="quarter"/>
+          </p:nvPr>
+        </p:nvSpPr>
+        <p:spPr/>
+        <p:txBody>
+          <a:bodyPr/>
+          <a:lstStyle/>
+          <a:p>
+            <a:r>
+              <a:t>Важно: ИИ — инструмент, а не замена учителя.</a:t>
+            </a:r>
+          </a:p>
+        </p:txBody>
+      </p:sp>
+      <p:sp>
+        <p:nvSpPr>
+          <p:cNvPr id="4" name="Slide Number Placeholder 3"/>
+          <p:cNvSpPr>
+            <a:spLocks noGrp="1"/>
+          </p:cNvSpPr>
+          <p:nvPr>
+            <p:ph type="sldNum" idx="5" sz="quarter"/>
+          </p:nvPr>
+        </p:nvSpPr>
+        <p:spPr/>
+      </p:sp>
+    </p:spTree>
+  </p:cSld>
+  <p:clrMapOvr>
+    <a:masterClrMapping/>
+  </p:clrMapOvr>
+</p:notes>
+</file>
+
+<file path=ppt/notesSlides/notesSlide6.xml><?xml version="1.0" encoding="utf-8"?>
+<p:notes xmlns:a="http://schemas.openxmlformats.org/drawingml/2006/main" xmlns:p="http://schemas.openxmlformats.org/presentationml/2006/main" xmlns:r="http://schemas.openxmlformats.org/officeDocument/2006/relationships">
+  <p:cSld>
+    <p:spTree>
+      <p:nvGrpSpPr>
+        <p:cNvPr id="1" name=""/>
+        <p:cNvGrpSpPr/>
+        <p:nvPr/>
+      </p:nvGrpSpPr>
+      <p:grpSpPr>
+        <a:xfrm>
+          <a:off x="0" y="0"/>
+          <a:ext cx="0" cy="0"/>
+          <a:chOff x="0" y="0"/>
+          <a:chExt cx="0" cy="0"/>
+        </a:xfrm>
+      </p:grpSpPr>
+      <p:sp>
+        <p:nvSpPr>
+          <p:cNvPr id="2" name="Slide Image Placeholder 1"/>
+          <p:cNvSpPr>
+            <a:spLocks noGrp="1"/>
+          </p:cNvSpPr>
+          <p:nvPr>
+            <p:ph type="sldImg" idx="2"/>
+          </p:nvPr>
+        </p:nvSpPr>
+        <p:spPr/>
+      </p:sp>
+      <p:sp>
+        <p:nvSpPr>
+          <p:cNvPr id="3" name="Notes Placeholder 2"/>
+          <p:cNvSpPr>
+            <a:spLocks noGrp="1"/>
+          </p:cNvSpPr>
+          <p:nvPr>
+            <p:ph type="body" idx="3" sz="quarter"/>
+          </p:nvPr>
+        </p:nvSpPr>
+        <p:spPr/>
+        <p:txBody>
+          <a:bodyPr/>
+          <a:lstStyle/>
+          <a:p>
+            <a:r>
+              <a:t>Демонстрация интерфейсов (по возможности).</a:t>
+            </a:r>
+          </a:p>
+        </p:txBody>
+      </p:sp>
+      <p:sp>
+        <p:nvSpPr>
+          <p:cNvPr id="4" name="Slide Number Placeholder 3"/>
+          <p:cNvSpPr>
+            <a:spLocks noGrp="1"/>
+          </p:cNvSpPr>
+          <p:nvPr>
+            <p:ph type="sldNum" idx="5" sz="quarter"/>
+          </p:nvPr>
+        </p:nvSpPr>
+        <p:spPr/>
+      </p:sp>
+    </p:spTree>
+  </p:cSld>
+  <p:clrMapOvr>
+    <a:masterClrMapping/>
+  </p:clrMapOvr>
+</p:notes>
+</file>
+
+<file path=ppt/notesSlides/notesSlide7.xml><?xml version="1.0" encoding="utf-8"?>
+<p:notes xmlns:a="http://schemas.openxmlformats.org/drawingml/2006/main" xmlns:p="http://schemas.openxmlformats.org/presentationml/2006/main" xmlns:r="http://schemas.openxmlformats.org/officeDocument/2006/relationships">
+  <p:cSld>
+    <p:spTree>
+      <p:nvGrpSpPr>
+        <p:cNvPr id="1" name=""/>
+        <p:cNvGrpSpPr/>
+        <p:nvPr/>
+      </p:nvGrpSpPr>
+      <p:grpSpPr>
+        <a:xfrm>
+          <a:off x="0" y="0"/>
+          <a:ext cx="0" cy="0"/>
+          <a:chOff x="0" y="0"/>
+          <a:chExt cx="0" cy="0"/>
+        </a:xfrm>
+      </p:grpSpPr>
+      <p:sp>
+        <p:nvSpPr>
+          <p:cNvPr id="2" name="Slide Image Placeholder 1"/>
+          <p:cNvSpPr>
+            <a:spLocks noGrp="1"/>
+          </p:cNvSpPr>
+          <p:nvPr>
+            <p:ph type="sldImg" idx="2"/>
+          </p:nvPr>
+        </p:nvSpPr>
+        <p:spPr/>
+      </p:sp>
+      <p:sp>
+        <p:nvSpPr>
+          <p:cNvPr id="3" name="Notes Placeholder 2"/>
+          <p:cNvSpPr>
+            <a:spLocks noGrp="1"/>
+          </p:cNvSpPr>
+          <p:nvPr>
+            <p:ph type="body" idx="3" sz="quarter"/>
+          </p:nvPr>
+        </p:nvSpPr>
+        <p:spPr/>
+        <p:txBody>
+          <a:bodyPr/>
+          <a:lstStyle/>
+          <a:p>
+            <a:r>
+              <a:t>Показать процесс работы с российским сервисом.</a:t>
+            </a:r>
+          </a:p>
+        </p:txBody>
+      </p:sp>
+      <p:sp>
+        <p:nvSpPr>
+          <p:cNvPr id="4" name="Slide Number Placeholder 3"/>
+          <p:cNvSpPr>
+            <a:spLocks noGrp="1"/>
+          </p:cNvSpPr>
+          <p:nvPr>
+            <p:ph type="sldNum" idx="5" sz="quarter"/>
+          </p:nvPr>
+        </p:nvSpPr>
+        <p:spPr/>
+      </p:sp>
+    </p:spTree>
+  </p:cSld>
+  <p:clrMapOvr>
+    <a:masterClrMapping/>
+  </p:clrMapOvr>
+</p:notes>
+</file>
+
+<file path=ppt/notesSlides/notesSlide8.xml><?xml version="1.0" encoding="utf-8"?>
+<p:notes xmlns:a="http://schemas.openxmlformats.org/drawingml/2006/main" xmlns:p="http://schemas.openxmlformats.org/presentationml/2006/main" xmlns:r="http://schemas.openxmlformats.org/officeDocument/2006/relationships">
+  <p:cSld>
+    <p:spTree>
+      <p:nvGrpSpPr>
+        <p:cNvPr id="1" name=""/>
+        <p:cNvGrpSpPr/>
+        <p:nvPr/>
+      </p:nvGrpSpPr>
+      <p:grpSpPr>
+        <a:xfrm>
+          <a:off x="0" y="0"/>
+          <a:ext cx="0" cy="0"/>
+          <a:chOff x="0" y="0"/>
+          <a:chExt cx="0" cy="0"/>
+        </a:xfrm>
+      </p:grpSpPr>
+      <p:sp>
+        <p:nvSpPr>
+          <p:cNvPr id="2" name="Slide Image Placeholder 1"/>
+          <p:cNvSpPr>
+            <a:spLocks noGrp="1"/>
+          </p:cNvSpPr>
+          <p:nvPr>
+            <p:ph type="sldImg" idx="2"/>
+          </p:nvPr>
+        </p:nvSpPr>
+        <p:spPr/>
+      </p:sp>
+      <p:sp>
+        <p:nvSpPr>
+          <p:cNvPr id="3" name="Notes Placeholder 2"/>
+          <p:cNvSpPr>
+            <a:spLocks noGrp="1"/>
+          </p:cNvSpPr>
+          <p:nvPr>
+            <p:ph type="body" idx="3" sz="quarter"/>
+          </p:nvPr>
+        </p:nvSpPr>
+        <p:spPr/>
+        <p:txBody>
+          <a:bodyPr/>
+          <a:lstStyle/>
+          <a:p>
+            <a:r>
+              <a:t>Раздать чек-лист для педагогов.</a:t>
+            </a:r>
+          </a:p>
+        </p:txBody>
+      </p:sp>
+      <p:sp>
+        <p:nvSpPr>
+          <p:cNvPr id="4" name="Slide Number Placeholder 3"/>
+          <p:cNvSpPr>
+            <a:spLocks noGrp="1"/>
+          </p:cNvSpPr>
+          <p:nvPr>
+            <p:ph type="sldNum" idx="5" sz="quarter"/>
+          </p:nvPr>
+        </p:nvSpPr>
+        <p:spPr/>
+      </p:sp>
+    </p:spTree>
+  </p:cSld>
+  <p:clrMapOvr>
+    <a:masterClrMapping/>
+  </p:clrMapOvr>
+</p:notes>
+</file>
+
+<file path=ppt/notesSlides/notesSlide9.xml><?xml version="1.0" encoding="utf-8"?>
+<p:notes xmlns:a="http://schemas.openxmlformats.org/drawingml/2006/main" xmlns:p="http://schemas.openxmlformats.org/presentationml/2006/main" xmlns:r="http://schemas.openxmlformats.org/officeDocument/2006/relationships">
+  <p:cSld>
+    <p:spTree>
+      <p:nvGrpSpPr>
+        <p:cNvPr id="1" name=""/>
+        <p:cNvGrpSpPr/>
+        <p:nvPr/>
+      </p:nvGrpSpPr>
+      <p:grpSpPr>
+        <a:xfrm>
+          <a:off x="0" y="0"/>
+          <a:ext cx="0" cy="0"/>
+          <a:chOff x="0" y="0"/>
+          <a:chExt cx="0" cy="0"/>
+        </a:xfrm>
+      </p:grpSpPr>
+      <p:sp>
+        <p:nvSpPr>
+          <p:cNvPr id="2" name="Slide Image Placeholder 1"/>
+          <p:cNvSpPr>
+            <a:spLocks noGrp="1"/>
+          </p:cNvSpPr>
+          <p:nvPr>
+            <p:ph type="sldImg" idx="2"/>
+          </p:nvPr>
+        </p:nvSpPr>
+        <p:spPr/>
+      </p:sp>
+      <p:sp>
+        <p:nvSpPr>
+          <p:cNvPr id="3" name="Notes Placeholder 2"/>
+          <p:cNvSpPr>
+            <a:spLocks noGrp="1"/>
+          </p:cNvSpPr>
+          <p:nvPr>
+            <p:ph type="body" idx="3" sz="quarter"/>
+          </p:nvPr>
+        </p:nvSpPr>
+        <p:spPr/>
+        <p:txBody>
+          <a:bodyPr/>
+          <a:lstStyle/>
+          <a:p>
+            <a:r>
+              <a:t>Время на самостоятельную работу — 10 минут.</a:t>
             </a:r>
           </a:p>
         </p:txBody>
@@ -3515,37 +4083,622 @@
             <a:spLocks noGrp="1"/>
           </p:cNvSpPr>
           <p:nvPr>
-            <p:ph type="ctrTitle"/>
-          </p:nvPr>
-        </p:nvSpPr>
-        <p:spPr/>
-        <p:txBody>
-          <a:bodyPr/>
-          <a:lstStyle/>
-          <a:p>
-            <a:r>
-              <a:t>Искусственный интеллект в работе учителя</a:t>
-            </a:r>
-          </a:p>
-        </p:txBody>
-      </p:sp>
-      <p:sp>
-        <p:nvSpPr>
-          <p:cNvPr id="3" name="Subtitle 2"/>
-          <p:cNvSpPr>
-            <a:spLocks noGrp="1"/>
-          </p:cNvSpPr>
-          <p:nvPr>
-            <p:ph type="subTitle" idx="1"/>
-          </p:nvPr>
-        </p:nvSpPr>
-        <p:spPr/>
-        <p:txBody>
-          <a:bodyPr/>
-          <a:lstStyle/>
-          <a:p>
-            <a:r>
-              <a:t>[Слайды не сформированы моделью]</a:t>
+            <p:ph type="title"/>
+          </p:nvPr>
+        </p:nvSpPr>
+        <p:spPr/>
+        <p:txBody>
+          <a:bodyPr/>
+          <a:lstStyle/>
+          <a:p>
+            <a:r>
+              <a:t>Генеративные нейросети: что это?</a:t>
+            </a:r>
+          </a:p>
+        </p:txBody>
+      </p:sp>
+      <p:sp>
+        <p:nvSpPr>
+          <p:cNvPr id="3" name="Content Placeholder 2"/>
+          <p:cNvSpPr>
+            <a:spLocks noGrp="1"/>
+          </p:cNvSpPr>
+          <p:nvPr>
+            <p:ph idx="1"/>
+          </p:nvPr>
+        </p:nvSpPr>
+        <p:spPr/>
+        <p:txBody>
+          <a:bodyPr/>
+          <a:lstStyle/>
+          <a:p>
+            <a:r>
+              <a:t>Генеративная нейросеть — это модель ИИ, способная создавать новый контент: текст, изображения, аудио, код и др.</a:t>
+            </a:r>
+          </a:p>
+        </p:txBody>
+      </p:sp>
+    </p:spTree>
+  </p:cSld>
+  <p:clrMapOvr>
+    <a:masterClrMapping/>
+  </p:clrMapOvr>
+</p:sld>
+</file>
+
+<file path=ppt/slides/slide2.xml><?xml version="1.0" encoding="utf-8"?>
+<p:sld xmlns:a="http://schemas.openxmlformats.org/drawingml/2006/main" xmlns:p="http://schemas.openxmlformats.org/presentationml/2006/main" xmlns:r="http://schemas.openxmlformats.org/officeDocument/2006/relationships">
+  <p:cSld>
+    <p:spTree>
+      <p:nvGrpSpPr>
+        <p:cNvPr id="1" name=""/>
+        <p:cNvGrpSpPr/>
+        <p:nvPr/>
+      </p:nvGrpSpPr>
+      <p:grpSpPr/>
+      <p:sp>
+        <p:nvSpPr>
+          <p:cNvPr id="2" name="Title 1"/>
+          <p:cNvSpPr>
+            <a:spLocks noGrp="1"/>
+          </p:cNvSpPr>
+          <p:nvPr>
+            <p:ph type="title"/>
+          </p:nvPr>
+        </p:nvSpPr>
+        <p:spPr/>
+        <p:txBody>
+          <a:bodyPr/>
+          <a:lstStyle/>
+          <a:p>
+            <a:r>
+              <a:t>Краткая история и актуальность</a:t>
+            </a:r>
+          </a:p>
+        </p:txBody>
+      </p:sp>
+      <p:sp>
+        <p:nvSpPr>
+          <p:cNvPr id="3" name="Content Placeholder 2"/>
+          <p:cNvSpPr>
+            <a:spLocks noGrp="1"/>
+          </p:cNvSpPr>
+          <p:nvPr>
+            <p:ph idx="1"/>
+          </p:nvPr>
+        </p:nvSpPr>
+        <p:spPr/>
+        <p:txBody>
+          <a:bodyPr/>
+          <a:lstStyle/>
+          <a:p>
+            <a:r>
+              <a:t>Первые идеи генеративных моделей — 1980-е (нейросетевые автокодировщики).</a:t>
+            </a:r>
+          </a:p>
+          <a:p>
+            <a:r>
+              <a:t>2014: генеративные состязательные сети (GAN).</a:t>
+            </a:r>
+          </a:p>
+          <a:p>
+            <a:r>
+              <a:t>2017: трансформеры (Transformer), появление GPT.</a:t>
+            </a:r>
+          </a:p>
+          <a:p>
+            <a:r>
+              <a:t>Сегодня генеративный ИИ — один из ключевых трендов в образовании и бизнесе.</a:t>
+            </a:r>
+          </a:p>
+        </p:txBody>
+      </p:sp>
+    </p:spTree>
+  </p:cSld>
+  <p:clrMapOvr>
+    <a:masterClrMapping/>
+  </p:clrMapOvr>
+</p:sld>
+</file>
+
+<file path=ppt/slides/slide3.xml><?xml version="1.0" encoding="utf-8"?>
+<p:sld xmlns:a="http://schemas.openxmlformats.org/drawingml/2006/main" xmlns:p="http://schemas.openxmlformats.org/presentationml/2006/main" xmlns:r="http://schemas.openxmlformats.org/officeDocument/2006/relationships">
+  <p:cSld>
+    <p:spTree>
+      <p:nvGrpSpPr>
+        <p:cNvPr id="1" name=""/>
+        <p:cNvGrpSpPr/>
+        <p:nvPr/>
+      </p:nvGrpSpPr>
+      <p:grpSpPr/>
+      <p:sp>
+        <p:nvSpPr>
+          <p:cNvPr id="2" name="Title 1"/>
+          <p:cNvSpPr>
+            <a:spLocks noGrp="1"/>
+          </p:cNvSpPr>
+          <p:nvPr>
+            <p:ph type="title"/>
+          </p:nvPr>
+        </p:nvSpPr>
+        <p:spPr/>
+        <p:txBody>
+          <a:bodyPr/>
+          <a:lstStyle/>
+          <a:p>
+            <a:r>
+              <a:t>Как работают генеративные модели?</a:t>
+            </a:r>
+          </a:p>
+        </p:txBody>
+      </p:sp>
+      <p:sp>
+        <p:nvSpPr>
+          <p:cNvPr id="3" name="Content Placeholder 2"/>
+          <p:cNvSpPr>
+            <a:spLocks noGrp="1"/>
+          </p:cNvSpPr>
+          <p:nvPr>
+            <p:ph idx="1"/>
+          </p:nvPr>
+        </p:nvSpPr>
+        <p:spPr/>
+        <p:txBody>
+          <a:bodyPr/>
+          <a:lstStyle/>
+          <a:p>
+            <a:r>
+              <a:t>Обучение на больших наборах данных.</a:t>
+            </a:r>
+          </a:p>
+          <a:p>
+            <a:r>
+              <a:t>Модели улавливают закономерности и стили.</a:t>
+            </a:r>
+          </a:p>
+          <a:p>
+            <a:r>
+              <a:t>Генерация нового контента по запросу (prompt).</a:t>
+            </a:r>
+          </a:p>
+          <a:p>
+            <a:r>
+              <a:t>Примеры архитектур: GPT (трансформеры), диффузионные модели (Stable Diffusion).</a:t>
+            </a:r>
+          </a:p>
+        </p:txBody>
+      </p:sp>
+    </p:spTree>
+  </p:cSld>
+  <p:clrMapOvr>
+    <a:masterClrMapping/>
+  </p:clrMapOvr>
+</p:sld>
+</file>
+
+<file path=ppt/slides/slide4.xml><?xml version="1.0" encoding="utf-8"?>
+<p:sld xmlns:a="http://schemas.openxmlformats.org/drawingml/2006/main" xmlns:p="http://schemas.openxmlformats.org/presentationml/2006/main" xmlns:r="http://schemas.openxmlformats.org/officeDocument/2006/relationships">
+  <p:cSld>
+    <p:spTree>
+      <p:nvGrpSpPr>
+        <p:cNvPr id="1" name=""/>
+        <p:cNvGrpSpPr/>
+        <p:nvPr/>
+      </p:nvGrpSpPr>
+      <p:grpSpPr/>
+      <p:sp>
+        <p:nvSpPr>
+          <p:cNvPr id="2" name="Title 1"/>
+          <p:cNvSpPr>
+            <a:spLocks noGrp="1"/>
+          </p:cNvSpPr>
+          <p:nvPr>
+            <p:ph type="title"/>
+          </p:nvPr>
+        </p:nvSpPr>
+        <p:spPr/>
+        <p:txBody>
+          <a:bodyPr/>
+          <a:lstStyle/>
+          <a:p>
+            <a:r>
+              <a:t>Возможности генеративных нейросетей</a:t>
+            </a:r>
+          </a:p>
+        </p:txBody>
+      </p:sp>
+      <p:sp>
+        <p:nvSpPr>
+          <p:cNvPr id="3" name="Content Placeholder 2"/>
+          <p:cNvSpPr>
+            <a:spLocks noGrp="1"/>
+          </p:cNvSpPr>
+          <p:nvPr>
+            <p:ph idx="1"/>
+          </p:nvPr>
+        </p:nvSpPr>
+        <p:spPr/>
+        <p:txBody>
+          <a:bodyPr/>
+          <a:lstStyle/>
+          <a:p>
+            <a:r>
+              <a:t>Создание текстов (сочинения, сценарии, конспекты).</a:t>
+            </a:r>
+          </a:p>
+          <a:p>
+            <a:r>
+              <a:t>Генерация изображений, иллюстраций, презентаций.</a:t>
+            </a:r>
+          </a:p>
+          <a:p>
+            <a:r>
+              <a:t>Помощь в программировании (генерация кода).</a:t>
+            </a:r>
+          </a:p>
+          <a:p>
+            <a:r>
+              <a:t>Поддержка персонализации обучения.</a:t>
+            </a:r>
+          </a:p>
+        </p:txBody>
+      </p:sp>
+    </p:spTree>
+  </p:cSld>
+  <p:clrMapOvr>
+    <a:masterClrMapping/>
+  </p:clrMapOvr>
+</p:sld>
+</file>
+
+<file path=ppt/slides/slide5.xml><?xml version="1.0" encoding="utf-8"?>
+<p:sld xmlns:a="http://schemas.openxmlformats.org/drawingml/2006/main" xmlns:p="http://schemas.openxmlformats.org/presentationml/2006/main" xmlns:r="http://schemas.openxmlformats.org/officeDocument/2006/relationships">
+  <p:cSld>
+    <p:spTree>
+      <p:nvGrpSpPr>
+        <p:cNvPr id="1" name=""/>
+        <p:cNvGrpSpPr/>
+        <p:nvPr/>
+      </p:nvGrpSpPr>
+      <p:grpSpPr/>
+      <p:sp>
+        <p:nvSpPr>
+          <p:cNvPr id="2" name="Title 1"/>
+          <p:cNvSpPr>
+            <a:spLocks noGrp="1"/>
+          </p:cNvSpPr>
+          <p:nvPr>
+            <p:ph type="title"/>
+          </p:nvPr>
+        </p:nvSpPr>
+        <p:spPr/>
+        <p:txBody>
+          <a:bodyPr/>
+          <a:lstStyle/>
+          <a:p>
+            <a:r>
+              <a:t>Ограничения и риски</a:t>
+            </a:r>
+          </a:p>
+        </p:txBody>
+      </p:sp>
+      <p:sp>
+        <p:nvSpPr>
+          <p:cNvPr id="3" name="Content Placeholder 2"/>
+          <p:cNvSpPr>
+            <a:spLocks noGrp="1"/>
+          </p:cNvSpPr>
+          <p:nvPr>
+            <p:ph idx="1"/>
+          </p:nvPr>
+        </p:nvSpPr>
+        <p:spPr/>
+        <p:txBody>
+          <a:bodyPr/>
+          <a:lstStyle/>
+          <a:p>
+            <a:r>
+              <a:t>Ошибки и галлюцинации (неверные факты).</a:t>
+            </a:r>
+          </a:p>
+          <a:p>
+            <a:r>
+              <a:t>Этические проблемы (авторское право, предвзятость).</a:t>
+            </a:r>
+          </a:p>
+          <a:p>
+            <a:r>
+              <a:t>Зависимость от качества обучающих данных.</a:t>
+            </a:r>
+          </a:p>
+          <a:p>
+            <a:r>
+              <a:t>Необходимость проверки и редактирования результата.</a:t>
+            </a:r>
+          </a:p>
+        </p:txBody>
+      </p:sp>
+    </p:spTree>
+  </p:cSld>
+  <p:clrMapOvr>
+    <a:masterClrMapping/>
+  </p:clrMapOvr>
+</p:sld>
+</file>
+
+<file path=ppt/slides/slide6.xml><?xml version="1.0" encoding="utf-8"?>
+<p:sld xmlns:a="http://schemas.openxmlformats.org/drawingml/2006/main" xmlns:p="http://schemas.openxmlformats.org/presentationml/2006/main" xmlns:r="http://schemas.openxmlformats.org/officeDocument/2006/relationships">
+  <p:cSld>
+    <p:spTree>
+      <p:nvGrpSpPr>
+        <p:cNvPr id="1" name=""/>
+        <p:cNvGrpSpPr/>
+        <p:nvPr/>
+      </p:nvGrpSpPr>
+      <p:grpSpPr/>
+      <p:sp>
+        <p:nvSpPr>
+          <p:cNvPr id="2" name="Title 1"/>
+          <p:cNvSpPr>
+            <a:spLocks noGrp="1"/>
+          </p:cNvSpPr>
+          <p:nvPr>
+            <p:ph type="title"/>
+          </p:nvPr>
+        </p:nvSpPr>
+        <p:spPr/>
+        <p:txBody>
+          <a:bodyPr/>
+          <a:lstStyle/>
+          <a:p>
+            <a:r>
+              <a:t>Российские нейросетевые сервисы</a:t>
+            </a:r>
+          </a:p>
+        </p:txBody>
+      </p:sp>
+      <p:sp>
+        <p:nvSpPr>
+          <p:cNvPr id="3" name="Content Placeholder 2"/>
+          <p:cNvSpPr>
+            <a:spLocks noGrp="1"/>
+          </p:cNvSpPr>
+          <p:nvPr>
+            <p:ph idx="1"/>
+          </p:nvPr>
+        </p:nvSpPr>
+        <p:spPr/>
+        <p:txBody>
+          <a:bodyPr/>
+          <a:lstStyle/>
+          <a:p>
+            <a:r>
+              <a:t>Яндекс GigaChat — текстовая генерация, помощь в подготовке уроков.</a:t>
+            </a:r>
+          </a:p>
+          <a:p>
+            <a:r>
+              <a:t>Сбер: Kandinsky (генерация изображений), GigaChat (образовательные сценарии).</a:t>
+            </a:r>
+          </a:p>
+          <a:p>
+            <a:r>
+              <a:t>RuGPT-3 (SberDevices) — генерация текстов на русском языке.</a:t>
+            </a:r>
+          </a:p>
+          <a:p>
+            <a:r>
+              <a:t>DeepPavlov — инструменты для чат-ботов и анализа текста.</a:t>
+            </a:r>
+          </a:p>
+        </p:txBody>
+      </p:sp>
+    </p:spTree>
+  </p:cSld>
+  <p:clrMapOvr>
+    <a:masterClrMapping/>
+  </p:clrMapOvr>
+</p:sld>
+</file>
+
+<file path=ppt/slides/slide7.xml><?xml version="1.0" encoding="utf-8"?>
+<p:sld xmlns:a="http://schemas.openxmlformats.org/drawingml/2006/main" xmlns:p="http://schemas.openxmlformats.org/presentationml/2006/main" xmlns:r="http://schemas.openxmlformats.org/officeDocument/2006/relationships">
+  <p:cSld>
+    <p:spTree>
+      <p:nvGrpSpPr>
+        <p:cNvPr id="1" name=""/>
+        <p:cNvGrpSpPr/>
+        <p:nvPr/>
+      </p:nvGrpSpPr>
+      <p:grpSpPr/>
+      <p:sp>
+        <p:nvSpPr>
+          <p:cNvPr id="2" name="Title 1"/>
+          <p:cNvSpPr>
+            <a:spLocks noGrp="1"/>
+          </p:cNvSpPr>
+          <p:nvPr>
+            <p:ph type="title"/>
+          </p:nvPr>
+        </p:nvSpPr>
+        <p:spPr/>
+        <p:txBody>
+          <a:bodyPr/>
+          <a:lstStyle/>
+          <a:p>
+            <a:r>
+              <a:t>Демонстрация: практический пример</a:t>
+            </a:r>
+          </a:p>
+        </p:txBody>
+      </p:sp>
+      <p:sp>
+        <p:nvSpPr>
+          <p:cNvPr id="3" name="Content Placeholder 2"/>
+          <p:cNvSpPr>
+            <a:spLocks noGrp="1"/>
+          </p:cNvSpPr>
+          <p:nvPr>
+            <p:ph idx="1"/>
+          </p:nvPr>
+        </p:nvSpPr>
+        <p:spPr/>
+        <p:txBody>
+          <a:bodyPr/>
+          <a:lstStyle/>
+          <a:p>
+            <a:r>
+              <a:t>Генерация конспекта урока по теме.</a:t>
+            </a:r>
+          </a:p>
+          <a:p>
+            <a:r>
+              <a:t>Создание иллюстрации к презентации.</a:t>
+            </a:r>
+          </a:p>
+          <a:p>
+            <a:r>
+              <a:t>Составление тестовых заданий на русском языке.</a:t>
+            </a:r>
+          </a:p>
+        </p:txBody>
+      </p:sp>
+    </p:spTree>
+  </p:cSld>
+  <p:clrMapOvr>
+    <a:masterClrMapping/>
+  </p:clrMapOvr>
+</p:sld>
+</file>
+
+<file path=ppt/slides/slide8.xml><?xml version="1.0" encoding="utf-8"?>
+<p:sld xmlns:a="http://schemas.openxmlformats.org/drawingml/2006/main" xmlns:p="http://schemas.openxmlformats.org/presentationml/2006/main" xmlns:r="http://schemas.openxmlformats.org/officeDocument/2006/relationships">
+  <p:cSld>
+    <p:spTree>
+      <p:nvGrpSpPr>
+        <p:cNvPr id="1" name=""/>
+        <p:cNvGrpSpPr/>
+        <p:nvPr/>
+      </p:nvGrpSpPr>
+      <p:grpSpPr/>
+      <p:sp>
+        <p:nvSpPr>
+          <p:cNvPr id="2" name="Title 1"/>
+          <p:cNvSpPr>
+            <a:spLocks noGrp="1"/>
+          </p:cNvSpPr>
+          <p:nvPr>
+            <p:ph type="title"/>
+          </p:nvPr>
+        </p:nvSpPr>
+        <p:spPr/>
+        <p:txBody>
+          <a:bodyPr/>
+          <a:lstStyle/>
+          <a:p>
+            <a:r>
+              <a:t>Безопасное использование ИИ в образовании</a:t>
+            </a:r>
+          </a:p>
+        </p:txBody>
+      </p:sp>
+      <p:sp>
+        <p:nvSpPr>
+          <p:cNvPr id="3" name="Content Placeholder 2"/>
+          <p:cNvSpPr>
+            <a:spLocks noGrp="1"/>
+          </p:cNvSpPr>
+          <p:nvPr>
+            <p:ph idx="1"/>
+          </p:nvPr>
+        </p:nvSpPr>
+        <p:spPr/>
+        <p:txBody>
+          <a:bodyPr/>
+          <a:lstStyle/>
+          <a:p>
+            <a:r>
+              <a:t>Защита персональных данных (не вводить ФИО, адреса).</a:t>
+            </a:r>
+          </a:p>
+          <a:p>
+            <a:r>
+              <a:t>Проверка фактов и редактирование ИИ-контента.</a:t>
+            </a:r>
+          </a:p>
+          <a:p>
+            <a:r>
+              <a:t>Соблюдение авторских прав (указывать источники).</a:t>
+            </a:r>
+          </a:p>
+          <a:p>
+            <a:r>
+              <a:t>Обсуждение с детьми: ИИ — помощник, а не истина в последней инстанции.</a:t>
+            </a:r>
+          </a:p>
+        </p:txBody>
+      </p:sp>
+    </p:spTree>
+  </p:cSld>
+  <p:clrMapOvr>
+    <a:masterClrMapping/>
+  </p:clrMapOvr>
+</p:sld>
+</file>
+
+<file path=ppt/slides/slide9.xml><?xml version="1.0" encoding="utf-8"?>
+<p:sld xmlns:a="http://schemas.openxmlformats.org/drawingml/2006/main" xmlns:p="http://schemas.openxmlformats.org/presentationml/2006/main" xmlns:r="http://schemas.openxmlformats.org/officeDocument/2006/relationships">
+  <p:cSld>
+    <p:spTree>
+      <p:nvGrpSpPr>
+        <p:cNvPr id="1" name=""/>
+        <p:cNvGrpSpPr/>
+        <p:nvPr/>
+      </p:nvGrpSpPr>
+      <p:grpSpPr/>
+      <p:sp>
+        <p:nvSpPr>
+          <p:cNvPr id="2" name="Title 1"/>
+          <p:cNvSpPr>
+            <a:spLocks noGrp="1"/>
+          </p:cNvSpPr>
+          <p:nvPr>
+            <p:ph type="title"/>
+          </p:nvPr>
+        </p:nvSpPr>
+        <p:spPr/>
+        <p:txBody>
+          <a:bodyPr/>
+          <a:lstStyle/>
+          <a:p>
+            <a:r>
+              <a:t>Практика и самопроверка</a:t>
+            </a:r>
+          </a:p>
+        </p:txBody>
+      </p:sp>
+      <p:sp>
+        <p:nvSpPr>
+          <p:cNvPr id="3" name="Content Placeholder 2"/>
+          <p:cNvSpPr>
+            <a:spLocks noGrp="1"/>
+          </p:cNvSpPr>
+          <p:nvPr>
+            <p:ph idx="1"/>
+          </p:nvPr>
+        </p:nvSpPr>
+        <p:spPr/>
+        <p:txBody>
+          <a:bodyPr/>
+          <a:lstStyle/>
+          <a:p>
+            <a:r>
+              <a:t>Попробуйте сгенерировать короткую инструкцию для урока с помощью российского ИИ.</a:t>
+            </a:r>
+          </a:p>
+          <a:p>
+            <a:r>
+              <a:t>Оцените результат: где ИИ помог, а где потребовалась правка?</a:t>
             </a:r>
           </a:p>
         </p:txBody>
